--- a/Fase 1/Evidencias Grupales/Presentación Proyecto.pptx
+++ b/Fase 1/Evidencias Grupales/Presentación Proyecto.pptx
@@ -2,64 +2,64 @@
 <file path=ppt/presentation.xml><?xml version="1.0" encoding="utf-8"?>
 <p:presentation xmlns:a="http://schemas.openxmlformats.org/drawingml/2006/main" xmlns:r="http://schemas.openxmlformats.org/officeDocument/2006/relationships" xmlns:mc="http://schemas.openxmlformats.org/markup-compatibility/2006" xmlns:mv="urn:schemas-microsoft-com:mac:vml" xmlns:p="http://schemas.openxmlformats.org/presentationml/2006/main" xmlns:c="http://schemas.openxmlformats.org/drawingml/2006/chart" xmlns:dgm="http://schemas.openxmlformats.org/drawingml/2006/diagram" xmlns:o="urn:schemas-microsoft-com:office:office" xmlns:v="urn:schemas-microsoft-com:vml" xmlns:pvml="urn:schemas-microsoft-com:office:powerpoint" xmlns:com="http://schemas.openxmlformats.org/drawingml/2006/compatibility" xmlns:p14="http://schemas.microsoft.com/office/powerpoint/2010/main" xmlns:p15="http://schemas.microsoft.com/office/powerpoint/2012/main" xmlns:ahyp="http://schemas.microsoft.com/office/drawing/2018/hyperlinkcolor" autoCompressPictures="0" embedTrueTypeFonts="1" strictFirstAndLastChars="0" saveSubsetFonts="1">
   <p:sldMasterIdLst>
-    <p:sldMasterId id="2147483648" r:id="rId6"/>
+    <p:sldMasterId id="2147483648" r:id="rId5"/>
   </p:sldMasterIdLst>
   <p:notesMasterIdLst>
-    <p:notesMasterId r:id="rId7"/>
+    <p:notesMasterId r:id="rId6"/>
   </p:notesMasterIdLst>
   <p:sldIdLst>
-    <p:sldId id="256" r:id="rId8"/>
-    <p:sldId id="257" r:id="rId9"/>
-    <p:sldId id="258" r:id="rId10"/>
-    <p:sldId id="259" r:id="rId11"/>
-    <p:sldId id="260" r:id="rId12"/>
-    <p:sldId id="261" r:id="rId13"/>
-    <p:sldId id="262" r:id="rId14"/>
-    <p:sldId id="263" r:id="rId15"/>
-    <p:sldId id="264" r:id="rId16"/>
-    <p:sldId id="265" r:id="rId17"/>
-    <p:sldId id="266" r:id="rId18"/>
-    <p:sldId id="267" r:id="rId19"/>
-    <p:sldId id="268" r:id="rId20"/>
-    <p:sldId id="269" r:id="rId21"/>
+    <p:sldId id="256" r:id="rId7"/>
+    <p:sldId id="257" r:id="rId8"/>
+    <p:sldId id="258" r:id="rId9"/>
+    <p:sldId id="259" r:id="rId10"/>
+    <p:sldId id="260" r:id="rId11"/>
+    <p:sldId id="261" r:id="rId12"/>
+    <p:sldId id="262" r:id="rId13"/>
+    <p:sldId id="263" r:id="rId14"/>
+    <p:sldId id="264" r:id="rId15"/>
+    <p:sldId id="265" r:id="rId16"/>
+    <p:sldId id="266" r:id="rId17"/>
+    <p:sldId id="267" r:id="rId18"/>
+    <p:sldId id="268" r:id="rId19"/>
+    <p:sldId id="269" r:id="rId20"/>
   </p:sldIdLst>
   <p:sldSz cy="6858000" cx="12192000"/>
   <p:notesSz cx="6858000" cy="9144000"/>
   <p:embeddedFontLst>
     <p:embeddedFont>
       <p:font typeface="Poppins"/>
-      <p:regular r:id="rId22"/>
-      <p:bold r:id="rId23"/>
-      <p:italic r:id="rId24"/>
-      <p:boldItalic r:id="rId25"/>
+      <p:regular r:id="rId21"/>
+      <p:bold r:id="rId22"/>
+      <p:italic r:id="rId23"/>
+      <p:boldItalic r:id="rId24"/>
     </p:embeddedFont>
     <p:embeddedFont>
       <p:font typeface="Lato"/>
-      <p:regular r:id="rId26"/>
-      <p:bold r:id="rId27"/>
-      <p:italic r:id="rId28"/>
-      <p:boldItalic r:id="rId29"/>
+      <p:regular r:id="rId25"/>
+      <p:bold r:id="rId26"/>
+      <p:italic r:id="rId27"/>
+      <p:boldItalic r:id="rId28"/>
     </p:embeddedFont>
     <p:embeddedFont>
       <p:font typeface="Inter"/>
-      <p:regular r:id="rId30"/>
-      <p:bold r:id="rId31"/>
-      <p:italic r:id="rId32"/>
-      <p:boldItalic r:id="rId33"/>
+      <p:regular r:id="rId29"/>
+      <p:bold r:id="rId30"/>
+      <p:italic r:id="rId31"/>
+      <p:boldItalic r:id="rId32"/>
     </p:embeddedFont>
     <p:embeddedFont>
       <p:font typeface="Plus Jakarta Sans"/>
-      <p:regular r:id="rId34"/>
-      <p:bold r:id="rId35"/>
-      <p:italic r:id="rId36"/>
-      <p:boldItalic r:id="rId37"/>
+      <p:regular r:id="rId33"/>
+      <p:bold r:id="rId34"/>
+      <p:italic r:id="rId35"/>
+      <p:boldItalic r:id="rId36"/>
     </p:embeddedFont>
     <p:embeddedFont>
       <p:font typeface="Plus Jakarta Sans SemiBold"/>
-      <p:regular r:id="rId38"/>
-      <p:bold r:id="rId39"/>
-      <p:italic r:id="rId40"/>
-      <p:boldItalic r:id="rId41"/>
+      <p:regular r:id="rId37"/>
+      <p:bold r:id="rId38"/>
+      <p:italic r:id="rId39"/>
+      <p:boldItalic r:id="rId40"/>
     </p:embeddedFont>
   </p:embeddedFontLst>
   <p:defaultTextStyle>
@@ -307,33 +307,10 @@
       </p15:sldGuideLst>
     </p:ext>
     <p:ext uri="GoogleSlidesCustomDataVersion2">
-      <go:slidesCustomData xmlns:go="http://customooxmlschemas.google.com/" r:id="rId42" roundtripDataSignature="AMtx7mjByQCU+lqhTFxFb+QHrWEXsAOthw=="/>
+      <go:slidesCustomData xmlns:go="http://customooxmlschemas.google.com/" r:id="rId41" roundtripDataSignature="AMtx7mi3yZXc1h7RWw+4geIUheMtiv0tuQ=="/>
     </p:ext>
   </p:extLst>
 </p:presentation>
-</file>
-
-<file path=ppt/commentAuthors.xml><?xml version="1.0" encoding="utf-8"?>
-<p:cmAuthorLst xmlns:a="http://schemas.openxmlformats.org/drawingml/2006/main" xmlns:r="http://schemas.openxmlformats.org/officeDocument/2006/relationships" xmlns:mc="http://schemas.openxmlformats.org/markup-compatibility/2006" xmlns:mv="urn:schemas-microsoft-com:mac:vml" xmlns:p="http://schemas.openxmlformats.org/presentationml/2006/main" xmlns:c="http://schemas.openxmlformats.org/drawingml/2006/chart" xmlns:dgm="http://schemas.openxmlformats.org/drawingml/2006/diagram" xmlns:o="urn:schemas-microsoft-com:office:office" xmlns:v="urn:schemas-microsoft-com:vml" xmlns:pvml="urn:schemas-microsoft-com:office:powerpoint" xmlns:com="http://schemas.openxmlformats.org/drawingml/2006/compatibility" xmlns:p14="http://schemas.microsoft.com/office/powerpoint/2010/main" xmlns:p15="http://schemas.microsoft.com/office/powerpoint/2012/main" xmlns:ahyp="http://schemas.microsoft.com/office/drawing/2018/hyperlinkcolor">
-  <p:cmAuthor clrIdx="0" id="0" initials="" lastIdx="1" name="DIEGO IGNACIO FEVRE SEGUEL"/>
-</p:cmAuthorLst>
-</file>
-
-<file path=ppt/comments/comment1.xml><?xml version="1.0" encoding="utf-8"?>
-<p:cmLst xmlns:a="http://schemas.openxmlformats.org/drawingml/2006/main" xmlns:r="http://schemas.openxmlformats.org/officeDocument/2006/relationships" xmlns:mc="http://schemas.openxmlformats.org/markup-compatibility/2006" xmlns:mv="urn:schemas-microsoft-com:mac:vml" xmlns:p="http://schemas.openxmlformats.org/presentationml/2006/main" xmlns:c="http://schemas.openxmlformats.org/drawingml/2006/chart" xmlns:dgm="http://schemas.openxmlformats.org/drawingml/2006/diagram" xmlns:o="urn:schemas-microsoft-com:office:office" xmlns:v="urn:schemas-microsoft-com:vml" xmlns:pvml="urn:schemas-microsoft-com:office:powerpoint" xmlns:com="http://schemas.openxmlformats.org/drawingml/2006/compatibility" xmlns:p14="http://schemas.microsoft.com/office/powerpoint/2010/main" xmlns:p15="http://schemas.microsoft.com/office/powerpoint/2012/main" xmlns:ahyp="http://schemas.microsoft.com/office/drawing/2018/hyperlinkcolor">
-  <p:cm authorId="0" idx="1" dt="2026-09-08T07:52:51.600">
-    <p:pos x="6000" y="0"/>
-    <p:text>Mabye si lograramos ingresar a la página con las credenciales (admin o develop), tengo algo de contenido la página</p:text>
-    <p:extLst>
-      <p:ext uri="{C676402C-5697-4E1C-873F-D02D1690AC5C}">
-        <p15:threadingInfo timeZoneBias="0"/>
-      </p:ext>
-      <p:ext uri="http://customooxmlschemas.google.com/">
-        <go:slidesCustomData xmlns:go="http://customooxmlschemas.google.com/" commentPostId="AAACGyHQDCE"/>
-      </p:ext>
-    </p:extLst>
-  </p:cm>
-</p:cmLst>
 </file>
 
 <file path=ppt/notesMasters/notesMaster1.xml><?xml version="1.0" encoding="utf-8"?>
@@ -15732,7 +15709,7 @@
                 <a:cs typeface="Poppins"/>
                 <a:sym typeface="Poppins"/>
               </a:rPr>
-              <a:t>CoreStream Web</a:t>
+              <a:t>CoreStream</a:t>
             </a:r>
             <a:endParaRPr b="0" i="0" sz="1400" u="none" cap="none" strike="noStrike">
               <a:solidFill>
@@ -19760,7 +19737,7 @@
             <a:tbl>
               <a:tblPr bandRow="1" firstRow="1">
                 <a:noFill/>
-                <a:tableStyleId>{CA426BF0-D878-4A2F-BDE3-69CB2F965C8A}</a:tableStyleId>
+                <a:tableStyleId>{D0BF4FEB-6809-4173-A92F-51A736F13E78}</a:tableStyleId>
               </a:tblPr>
               <a:tblGrid>
                 <a:gridCol w="4220325"/>
@@ -29850,7 +29827,55 @@
                 <a:cs typeface="Poppins"/>
                 <a:sym typeface="Poppins"/>
               </a:rPr>
-              <a:t>Requerimientos funcionales asignados</a:t>
+              <a:t>Requerimientos </a:t>
+            </a:r>
+            <a:r>
+              <a:rPr b="1" lang="en-US" sz="2700">
+                <a:solidFill>
+                  <a:srgbClr val="0F172A"/>
+                </a:solidFill>
+                <a:latin typeface="Poppins"/>
+                <a:ea typeface="Poppins"/>
+                <a:cs typeface="Poppins"/>
+                <a:sym typeface="Poppins"/>
+              </a:rPr>
+              <a:t>F</a:t>
+            </a:r>
+            <a:r>
+              <a:rPr b="1" i="0" lang="en-US" sz="2700" u="none" cap="none" strike="noStrike">
+                <a:solidFill>
+                  <a:srgbClr val="0F172A"/>
+                </a:solidFill>
+                <a:latin typeface="Poppins"/>
+                <a:ea typeface="Poppins"/>
+                <a:cs typeface="Poppins"/>
+                <a:sym typeface="Poppins"/>
+              </a:rPr>
+              <a:t>uncionales </a:t>
+            </a:r>
+            <a:r>
+              <a:rPr b="1" lang="en-US" sz="2700">
+                <a:solidFill>
+                  <a:srgbClr val="0F172A"/>
+                </a:solidFill>
+                <a:latin typeface="Poppins"/>
+                <a:ea typeface="Poppins"/>
+                <a:cs typeface="Poppins"/>
+                <a:sym typeface="Poppins"/>
+              </a:rPr>
+              <a:t>A</a:t>
+            </a:r>
+            <a:r>
+              <a:rPr b="1" i="0" lang="en-US" sz="2700" u="none" cap="none" strike="noStrike">
+                <a:solidFill>
+                  <a:srgbClr val="0F172A"/>
+                </a:solidFill>
+                <a:latin typeface="Poppins"/>
+                <a:ea typeface="Poppins"/>
+                <a:cs typeface="Poppins"/>
+                <a:sym typeface="Poppins"/>
+              </a:rPr>
+              <a:t>signados</a:t>
             </a:r>
             <a:endParaRPr b="0" i="0" sz="1400" u="none" cap="none" strike="noStrike">
               <a:solidFill>
@@ -29938,7 +29963,7 @@
             <a:tbl>
               <a:tblPr bandRow="1" firstRow="1">
                 <a:noFill/>
-                <a:tableStyleId>{B88CC869-2C1F-4F8F-B733-5FB16E9C0E76}</a:tableStyleId>
+                <a:tableStyleId>{DDAED1CB-46BC-4002-9EFD-AE6B2585B8C7}</a:tableStyleId>
               </a:tblPr>
               <a:tblGrid>
                 <a:gridCol w="1082125"/>
@@ -32701,7 +32726,7 @@
             <a:tbl>
               <a:tblPr bandRow="1" firstRow="1">
                 <a:noFill/>
-                <a:tableStyleId>{B88CC869-2C1F-4F8F-B733-5FB16E9C0E76}</a:tableStyleId>
+                <a:tableStyleId>{DDAED1CB-46BC-4002-9EFD-AE6B2585B8C7}</a:tableStyleId>
               </a:tblPr>
               <a:tblGrid>
                 <a:gridCol w="1082125"/>
@@ -35063,7 +35088,55 @@
                 <a:cs typeface="Poppins"/>
                 <a:sym typeface="Poppins"/>
               </a:rPr>
-              <a:t>Nuevas funcionalidades asignadas</a:t>
+              <a:t>Nuevas </a:t>
+            </a:r>
+            <a:r>
+              <a:rPr b="1" lang="en-US" sz="2700">
+                <a:solidFill>
+                  <a:srgbClr val="0F172A"/>
+                </a:solidFill>
+                <a:latin typeface="Poppins"/>
+                <a:ea typeface="Poppins"/>
+                <a:cs typeface="Poppins"/>
+                <a:sym typeface="Poppins"/>
+              </a:rPr>
+              <a:t>F</a:t>
+            </a:r>
+            <a:r>
+              <a:rPr b="1" i="0" lang="en-US" sz="2700" u="none" cap="none" strike="noStrike">
+                <a:solidFill>
+                  <a:srgbClr val="0F172A"/>
+                </a:solidFill>
+                <a:latin typeface="Poppins"/>
+                <a:ea typeface="Poppins"/>
+                <a:cs typeface="Poppins"/>
+                <a:sym typeface="Poppins"/>
+              </a:rPr>
+              <a:t>uncionalidades </a:t>
+            </a:r>
+            <a:r>
+              <a:rPr b="1" lang="en-US" sz="2700">
+                <a:solidFill>
+                  <a:srgbClr val="0F172A"/>
+                </a:solidFill>
+                <a:latin typeface="Poppins"/>
+                <a:ea typeface="Poppins"/>
+                <a:cs typeface="Poppins"/>
+                <a:sym typeface="Poppins"/>
+              </a:rPr>
+              <a:t>A</a:t>
+            </a:r>
+            <a:r>
+              <a:rPr b="1" i="0" lang="en-US" sz="2700" u="none" cap="none" strike="noStrike">
+                <a:solidFill>
+                  <a:srgbClr val="0F172A"/>
+                </a:solidFill>
+                <a:latin typeface="Poppins"/>
+                <a:ea typeface="Poppins"/>
+                <a:cs typeface="Poppins"/>
+                <a:sym typeface="Poppins"/>
+              </a:rPr>
+              <a:t>signadas</a:t>
             </a:r>
             <a:endParaRPr b="0" i="0" sz="1400" u="none" cap="none" strike="noStrike">
               <a:solidFill>
@@ -35151,7 +35224,7 @@
             <a:tbl>
               <a:tblPr bandRow="1" firstRow="1">
                 <a:noFill/>
-                <a:tableStyleId>{B88CC869-2C1F-4F8F-B733-5FB16E9C0E76}</a:tableStyleId>
+                <a:tableStyleId>{DDAED1CB-46BC-4002-9EFD-AE6B2585B8C7}</a:tableStyleId>
               </a:tblPr>
               <a:tblGrid>
                 <a:gridCol w="1082125"/>
@@ -37434,7 +37507,7 @@
             <a:tbl>
               <a:tblPr bandRow="1" firstRow="1">
                 <a:noFill/>
-                <a:tableStyleId>{B88CC869-2C1F-4F8F-B733-5FB16E9C0E76}</a:tableStyleId>
+                <a:tableStyleId>{DDAED1CB-46BC-4002-9EFD-AE6B2585B8C7}</a:tableStyleId>
               </a:tblPr>
               <a:tblGrid>
                 <a:gridCol w="1082125"/>
@@ -41080,7 +41153,7 @@
           <p:nvPr/>
         </p:nvPicPr>
         <p:blipFill rotWithShape="1">
-          <a:blip r:embed="rId4">
+          <a:blip r:embed="rId3">
             <a:alphaModFix/>
           </a:blip>
           <a:srcRect b="0" l="0" r="0" t="0"/>
@@ -41298,7 +41371,7 @@
           <p:nvPr/>
         </p:nvPicPr>
         <p:blipFill rotWithShape="1">
-          <a:blip r:embed="rId5">
+          <a:blip r:embed="rId4">
             <a:alphaModFix/>
           </a:blip>
           <a:srcRect b="0" l="0" r="0" t="0"/>
@@ -41327,6 +41400,285 @@
 </file>
 
 <file path=ppt/theme/theme1.xml><?xml version="1.0" encoding="utf-8"?>
+<a:theme xmlns:a="http://schemas.openxmlformats.org/drawingml/2006/main" xmlns:r="http://schemas.openxmlformats.org/officeDocument/2006/relationships">
+  <a:themeElements>
+    <a:clrScheme name="Default">
+      <a:dk1>
+        <a:srgbClr val="000000"/>
+      </a:dk1>
+      <a:lt1>
+        <a:srgbClr val="FFFFFF"/>
+      </a:lt1>
+      <a:dk2>
+        <a:srgbClr val="158158"/>
+      </a:dk2>
+      <a:lt2>
+        <a:srgbClr val="F3F3F3"/>
+      </a:lt2>
+      <a:accent1>
+        <a:srgbClr val="058DC7"/>
+      </a:accent1>
+      <a:accent2>
+        <a:srgbClr val="50B432"/>
+      </a:accent2>
+      <a:accent3>
+        <a:srgbClr val="ED561B"/>
+      </a:accent3>
+      <a:accent4>
+        <a:srgbClr val="EDEF00"/>
+      </a:accent4>
+      <a:accent5>
+        <a:srgbClr val="24CBE5"/>
+      </a:accent5>
+      <a:accent6>
+        <a:srgbClr val="64E572"/>
+      </a:accent6>
+      <a:hlink>
+        <a:srgbClr val="2200CC"/>
+      </a:hlink>
+      <a:folHlink>
+        <a:srgbClr val="551A8B"/>
+      </a:folHlink>
+    </a:clrScheme>
+    <a:fontScheme name="Office">
+      <a:majorFont>
+        <a:latin typeface="Arial"/>
+        <a:ea typeface=""/>
+        <a:cs typeface=""/>
+        <a:font script="Jpan" typeface="ＭＳ Ｐゴシック"/>
+        <a:font script="Hang" typeface="맑은 고딕"/>
+        <a:font script="Hans" typeface="宋体"/>
+        <a:font script="Hant" typeface="新細明體"/>
+        <a:font script="Arab" typeface="Times New Roman"/>
+        <a:font script="Hebr" typeface="Times New Roman"/>
+        <a:font script="Thai" typeface="Angsana New"/>
+        <a:font script="Ethi" typeface="Nyala"/>
+        <a:font script="Beng" typeface="Vrinda"/>
+        <a:font script="Gujr" typeface="Shruti"/>
+        <a:font script="Khmr" typeface="MoolBoran"/>
+        <a:font script="Knda" typeface="Tunga"/>
+        <a:font script="Guru" typeface="Raavi"/>
+        <a:font script="Cans" typeface="Euphemia"/>
+        <a:font script="Cher" typeface="Plantagenet Cherokee"/>
+        <a:font script="Yiii" typeface="Microsoft Yi Baiti"/>
+        <a:font script="Tibt" typeface="Microsoft Himalaya"/>
+        <a:font script="Thaa" typeface="MV Boli"/>
+        <a:font script="Deva" typeface="Mangal"/>
+        <a:font script="Telu" typeface="Gautami"/>
+        <a:font script="Taml" typeface="Latha"/>
+        <a:font script="Syrc" typeface="Estrangelo Edessa"/>
+        <a:font script="Orya" typeface="Kalinga"/>
+        <a:font script="Mlym" typeface="Kartika"/>
+        <a:font script="Laoo" typeface="DokChampa"/>
+        <a:font script="Sinh" typeface="Iskoola Pota"/>
+        <a:font script="Mong" typeface="Mongolian Baiti"/>
+        <a:font script="Viet" typeface="Times New Roman"/>
+        <a:font script="Uigh" typeface="Microsoft Uighur"/>
+        <a:font script="Geor" typeface="Sylfaen"/>
+      </a:majorFont>
+      <a:minorFont>
+        <a:latin typeface="Arial"/>
+        <a:ea typeface=""/>
+        <a:cs typeface=""/>
+        <a:font script="Jpan" typeface="ＭＳ Ｐゴシック"/>
+        <a:font script="Hang" typeface="맑은 고딕"/>
+        <a:font script="Hans" typeface="宋体"/>
+        <a:font script="Hant" typeface="新細明體"/>
+        <a:font script="Arab" typeface="Arial"/>
+        <a:font script="Hebr" typeface="Arial"/>
+        <a:font script="Thai" typeface="Cordia New"/>
+        <a:font script="Ethi" typeface="Nyala"/>
+        <a:font script="Beng" typeface="Vrinda"/>
+        <a:font script="Gujr" typeface="Shruti"/>
+        <a:font script="Khmr" typeface="DaunPenh"/>
+        <a:font script="Knda" typeface="Tunga"/>
+        <a:font script="Guru" typeface="Raavi"/>
+        <a:font script="Cans" typeface="Euphemia"/>
+        <a:font script="Cher" typeface="Plantagenet Cherokee"/>
+        <a:font script="Yiii" typeface="Microsoft Yi Baiti"/>
+        <a:font script="Tibt" typeface="Microsoft Himalaya"/>
+        <a:font script="Thaa" typeface="MV Boli"/>
+        <a:font script="Deva" typeface="Mangal"/>
+        <a:font script="Telu" typeface="Gautami"/>
+        <a:font script="Taml" typeface="Latha"/>
+        <a:font script="Syrc" typeface="Estrangelo Edessa"/>
+        <a:font script="Orya" typeface="Kalinga"/>
+        <a:font script="Mlym" typeface="Kartika"/>
+        <a:font script="Laoo" typeface="DokChampa"/>
+        <a:font script="Sinh" typeface="Iskoola Pota"/>
+        <a:font script="Mong" typeface="Mongolian Baiti"/>
+        <a:font script="Viet" typeface="Arial"/>
+        <a:font script="Uigh" typeface="Microsoft Uighur"/>
+        <a:font script="Geor" typeface="Sylfaen"/>
+      </a:minorFont>
+    </a:fontScheme>
+    <a:fmtScheme name="Office">
+      <a:fillStyleLst>
+        <a:solidFill>
+          <a:schemeClr val="phClr"/>
+        </a:solidFill>
+        <a:gradFill rotWithShape="1">
+          <a:gsLst>
+            <a:gs pos="0">
+              <a:schemeClr val="phClr">
+                <a:tint val="50000"/>
+                <a:satMod val="300000"/>
+              </a:schemeClr>
+            </a:gs>
+            <a:gs pos="35000">
+              <a:schemeClr val="phClr">
+                <a:tint val="37000"/>
+                <a:satMod val="300000"/>
+              </a:schemeClr>
+            </a:gs>
+            <a:gs pos="100000">
+              <a:schemeClr val="phClr">
+                <a:tint val="15000"/>
+                <a:satMod val="350000"/>
+              </a:schemeClr>
+            </a:gs>
+          </a:gsLst>
+          <a:lin ang="16200000" scaled="1"/>
+        </a:gradFill>
+        <a:gradFill rotWithShape="1">
+          <a:gsLst>
+            <a:gs pos="0">
+              <a:schemeClr val="phClr">
+                <a:tint val="100000"/>
+                <a:shade val="100000"/>
+                <a:satMod val="130000"/>
+              </a:schemeClr>
+            </a:gs>
+            <a:gs pos="100000">
+              <a:schemeClr val="phClr">
+                <a:tint val="50000"/>
+                <a:shade val="100000"/>
+                <a:satMod val="350000"/>
+              </a:schemeClr>
+            </a:gs>
+          </a:gsLst>
+          <a:lin ang="16200000" scaled="0"/>
+        </a:gradFill>
+      </a:fillStyleLst>
+      <a:lnStyleLst>
+        <a:ln w="9525" cap="flat" cmpd="sng" algn="ctr">
+          <a:solidFill>
+            <a:schemeClr val="phClr">
+              <a:shade val="95000"/>
+              <a:satMod val="105000"/>
+            </a:schemeClr>
+          </a:solidFill>
+          <a:prstDash val="solid"/>
+        </a:ln>
+        <a:ln w="25400" cap="flat" cmpd="sng" algn="ctr">
+          <a:solidFill>
+            <a:schemeClr val="phClr"/>
+          </a:solidFill>
+          <a:prstDash val="solid"/>
+        </a:ln>
+        <a:ln w="38100" cap="flat" cmpd="sng" algn="ctr">
+          <a:solidFill>
+            <a:schemeClr val="phClr"/>
+          </a:solidFill>
+          <a:prstDash val="solid"/>
+        </a:ln>
+      </a:lnStyleLst>
+      <a:effectStyleLst>
+        <a:effectStyle>
+          <a:effectLst>
+            <a:outerShdw blurRad="40000" dist="20000" dir="5400000" rotWithShape="0">
+              <a:srgbClr val="000000">
+                <a:alpha val="38000"/>
+              </a:srgbClr>
+            </a:outerShdw>
+          </a:effectLst>
+        </a:effectStyle>
+        <a:effectStyle>
+          <a:effectLst>
+            <a:outerShdw blurRad="40000" dist="23000" dir="5400000" rotWithShape="0">
+              <a:srgbClr val="000000">
+                <a:alpha val="35000"/>
+              </a:srgbClr>
+            </a:outerShdw>
+          </a:effectLst>
+        </a:effectStyle>
+        <a:effectStyle>
+          <a:effectLst>
+            <a:outerShdw blurRad="40000" dist="23000" dir="5400000" rotWithShape="0">
+              <a:srgbClr val="000000">
+                <a:alpha val="35000"/>
+              </a:srgbClr>
+            </a:outerShdw>
+          </a:effectLst>
+          <a:scene3d>
+            <a:camera prst="orthographicFront">
+              <a:rot lat="0" lon="0" rev="0"/>
+            </a:camera>
+            <a:lightRig rig="threePt" dir="t">
+              <a:rot lat="0" lon="0" rev="1200000"/>
+            </a:lightRig>
+          </a:scene3d>
+          <a:sp3d>
+            <a:bevelT w="63500" h="25400"/>
+          </a:sp3d>
+        </a:effectStyle>
+      </a:effectStyleLst>
+      <a:bgFillStyleLst>
+        <a:solidFill>
+          <a:schemeClr val="phClr"/>
+        </a:solidFill>
+        <a:gradFill rotWithShape="1">
+          <a:gsLst>
+            <a:gs pos="0">
+              <a:schemeClr val="phClr">
+                <a:tint val="40000"/>
+                <a:satMod val="350000"/>
+              </a:schemeClr>
+            </a:gs>
+            <a:gs pos="40000">
+              <a:schemeClr val="phClr">
+                <a:tint val="45000"/>
+                <a:shade val="99000"/>
+                <a:satMod val="350000"/>
+              </a:schemeClr>
+            </a:gs>
+            <a:gs pos="100000">
+              <a:schemeClr val="phClr">
+                <a:shade val="20000"/>
+                <a:satMod val="255000"/>
+              </a:schemeClr>
+            </a:gs>
+          </a:gsLst>
+          <a:path path="circle">
+            <a:fillToRect l="50000" t="-80000" r="50000" b="180000"/>
+          </a:path>
+        </a:gradFill>
+        <a:gradFill rotWithShape="1">
+          <a:gsLst>
+            <a:gs pos="0">
+              <a:schemeClr val="phClr">
+                <a:tint val="80000"/>
+                <a:satMod val="300000"/>
+              </a:schemeClr>
+            </a:gs>
+            <a:gs pos="100000">
+              <a:schemeClr val="phClr">
+                <a:shade val="30000"/>
+                <a:satMod val="200000"/>
+              </a:schemeClr>
+            </a:gs>
+          </a:gsLst>
+          <a:path path="circle">
+            <a:fillToRect l="50000" t="50000" r="50000" b="50000"/>
+          </a:path>
+        </a:gradFill>
+      </a:bgFillStyleLst>
+    </a:fmtScheme>
+  </a:themeElements>
+</a:theme>
+</file>
+
+<file path=ppt/theme/theme2.xml><?xml version="1.0" encoding="utf-8"?>
 <a:theme xmlns:a="http://schemas.openxmlformats.org/drawingml/2006/main" xmlns:r="http://schemas.openxmlformats.org/officeDocument/2006/relationships" name="Office Theme">
   <a:themeElements>
     <a:clrScheme name="Office">
@@ -41603,283 +41955,4 @@
     </a:fmtScheme>
   </a:themeElements>
 </a:theme>
-</file>
-
-<file path=ppt/theme/theme2.xml><?xml version="1.0" encoding="utf-8"?>
-<a:theme xmlns:a="http://schemas.openxmlformats.org/drawingml/2006/main" xmlns:r="http://schemas.openxmlformats.org/officeDocument/2006/relationships">
-  <a:themeElements>
-    <a:clrScheme name="Default">
-      <a:dk1>
-        <a:srgbClr val="000000"/>
-      </a:dk1>
-      <a:lt1>
-        <a:srgbClr val="FFFFFF"/>
-      </a:lt1>
-      <a:dk2>
-        <a:srgbClr val="158158"/>
-      </a:dk2>
-      <a:lt2>
-        <a:srgbClr val="F3F3F3"/>
-      </a:lt2>
-      <a:accent1>
-        <a:srgbClr val="058DC7"/>
-      </a:accent1>
-      <a:accent2>
-        <a:srgbClr val="50B432"/>
-      </a:accent2>
-      <a:accent3>
-        <a:srgbClr val="ED561B"/>
-      </a:accent3>
-      <a:accent4>
-        <a:srgbClr val="EDEF00"/>
-      </a:accent4>
-      <a:accent5>
-        <a:srgbClr val="24CBE5"/>
-      </a:accent5>
-      <a:accent6>
-        <a:srgbClr val="64E572"/>
-      </a:accent6>
-      <a:hlink>
-        <a:srgbClr val="2200CC"/>
-      </a:hlink>
-      <a:folHlink>
-        <a:srgbClr val="551A8B"/>
-      </a:folHlink>
-    </a:clrScheme>
-    <a:fontScheme name="Office">
-      <a:majorFont>
-        <a:latin typeface="Arial"/>
-        <a:ea typeface=""/>
-        <a:cs typeface=""/>
-        <a:font script="Jpan" typeface="ＭＳ Ｐゴシック"/>
-        <a:font script="Hang" typeface="맑은 고딕"/>
-        <a:font script="Hans" typeface="宋体"/>
-        <a:font script="Hant" typeface="新細明體"/>
-        <a:font script="Arab" typeface="Times New Roman"/>
-        <a:font script="Hebr" typeface="Times New Roman"/>
-        <a:font script="Thai" typeface="Angsana New"/>
-        <a:font script="Ethi" typeface="Nyala"/>
-        <a:font script="Beng" typeface="Vrinda"/>
-        <a:font script="Gujr" typeface="Shruti"/>
-        <a:font script="Khmr" typeface="MoolBoran"/>
-        <a:font script="Knda" typeface="Tunga"/>
-        <a:font script="Guru" typeface="Raavi"/>
-        <a:font script="Cans" typeface="Euphemia"/>
-        <a:font script="Cher" typeface="Plantagenet Cherokee"/>
-        <a:font script="Yiii" typeface="Microsoft Yi Baiti"/>
-        <a:font script="Tibt" typeface="Microsoft Himalaya"/>
-        <a:font script="Thaa" typeface="MV Boli"/>
-        <a:font script="Deva" typeface="Mangal"/>
-        <a:font script="Telu" typeface="Gautami"/>
-        <a:font script="Taml" typeface="Latha"/>
-        <a:font script="Syrc" typeface="Estrangelo Edessa"/>
-        <a:font script="Orya" typeface="Kalinga"/>
-        <a:font script="Mlym" typeface="Kartika"/>
-        <a:font script="Laoo" typeface="DokChampa"/>
-        <a:font script="Sinh" typeface="Iskoola Pota"/>
-        <a:font script="Mong" typeface="Mongolian Baiti"/>
-        <a:font script="Viet" typeface="Times New Roman"/>
-        <a:font script="Uigh" typeface="Microsoft Uighur"/>
-        <a:font script="Geor" typeface="Sylfaen"/>
-      </a:majorFont>
-      <a:minorFont>
-        <a:latin typeface="Arial"/>
-        <a:ea typeface=""/>
-        <a:cs typeface=""/>
-        <a:font script="Jpan" typeface="ＭＳ Ｐゴシック"/>
-        <a:font script="Hang" typeface="맑은 고딕"/>
-        <a:font script="Hans" typeface="宋体"/>
-        <a:font script="Hant" typeface="新細明體"/>
-        <a:font script="Arab" typeface="Arial"/>
-        <a:font script="Hebr" typeface="Arial"/>
-        <a:font script="Thai" typeface="Cordia New"/>
-        <a:font script="Ethi" typeface="Nyala"/>
-        <a:font script="Beng" typeface="Vrinda"/>
-        <a:font script="Gujr" typeface="Shruti"/>
-        <a:font script="Khmr" typeface="DaunPenh"/>
-        <a:font script="Knda" typeface="Tunga"/>
-        <a:font script="Guru" typeface="Raavi"/>
-        <a:font script="Cans" typeface="Euphemia"/>
-        <a:font script="Cher" typeface="Plantagenet Cherokee"/>
-        <a:font script="Yiii" typeface="Microsoft Yi Baiti"/>
-        <a:font script="Tibt" typeface="Microsoft Himalaya"/>
-        <a:font script="Thaa" typeface="MV Boli"/>
-        <a:font script="Deva" typeface="Mangal"/>
-        <a:font script="Telu" typeface="Gautami"/>
-        <a:font script="Taml" typeface="Latha"/>
-        <a:font script="Syrc" typeface="Estrangelo Edessa"/>
-        <a:font script="Orya" typeface="Kalinga"/>
-        <a:font script="Mlym" typeface="Kartika"/>
-        <a:font script="Laoo" typeface="DokChampa"/>
-        <a:font script="Sinh" typeface="Iskoola Pota"/>
-        <a:font script="Mong" typeface="Mongolian Baiti"/>
-        <a:font script="Viet" typeface="Arial"/>
-        <a:font script="Uigh" typeface="Microsoft Uighur"/>
-        <a:font script="Geor" typeface="Sylfaen"/>
-      </a:minorFont>
-    </a:fontScheme>
-    <a:fmtScheme name="Office">
-      <a:fillStyleLst>
-        <a:solidFill>
-          <a:schemeClr val="phClr"/>
-        </a:solidFill>
-        <a:gradFill rotWithShape="1">
-          <a:gsLst>
-            <a:gs pos="0">
-              <a:schemeClr val="phClr">
-                <a:tint val="50000"/>
-                <a:satMod val="300000"/>
-              </a:schemeClr>
-            </a:gs>
-            <a:gs pos="35000">
-              <a:schemeClr val="phClr">
-                <a:tint val="37000"/>
-                <a:satMod val="300000"/>
-              </a:schemeClr>
-            </a:gs>
-            <a:gs pos="100000">
-              <a:schemeClr val="phClr">
-                <a:tint val="15000"/>
-                <a:satMod val="350000"/>
-              </a:schemeClr>
-            </a:gs>
-          </a:gsLst>
-          <a:lin ang="16200000" scaled="1"/>
-        </a:gradFill>
-        <a:gradFill rotWithShape="1">
-          <a:gsLst>
-            <a:gs pos="0">
-              <a:schemeClr val="phClr">
-                <a:tint val="100000"/>
-                <a:shade val="100000"/>
-                <a:satMod val="130000"/>
-              </a:schemeClr>
-            </a:gs>
-            <a:gs pos="100000">
-              <a:schemeClr val="phClr">
-                <a:tint val="50000"/>
-                <a:shade val="100000"/>
-                <a:satMod val="350000"/>
-              </a:schemeClr>
-            </a:gs>
-          </a:gsLst>
-          <a:lin ang="16200000" scaled="0"/>
-        </a:gradFill>
-      </a:fillStyleLst>
-      <a:lnStyleLst>
-        <a:ln w="9525" cap="flat" cmpd="sng" algn="ctr">
-          <a:solidFill>
-            <a:schemeClr val="phClr">
-              <a:shade val="95000"/>
-              <a:satMod val="105000"/>
-            </a:schemeClr>
-          </a:solidFill>
-          <a:prstDash val="solid"/>
-        </a:ln>
-        <a:ln w="25400" cap="flat" cmpd="sng" algn="ctr">
-          <a:solidFill>
-            <a:schemeClr val="phClr"/>
-          </a:solidFill>
-          <a:prstDash val="solid"/>
-        </a:ln>
-        <a:ln w="38100" cap="flat" cmpd="sng" algn="ctr">
-          <a:solidFill>
-            <a:schemeClr val="phClr"/>
-          </a:solidFill>
-          <a:prstDash val="solid"/>
-        </a:ln>
-      </a:lnStyleLst>
-      <a:effectStyleLst>
-        <a:effectStyle>
-          <a:effectLst>
-            <a:outerShdw blurRad="40000" dist="20000" dir="5400000" rotWithShape="0">
-              <a:srgbClr val="000000">
-                <a:alpha val="38000"/>
-              </a:srgbClr>
-            </a:outerShdw>
-          </a:effectLst>
-        </a:effectStyle>
-        <a:effectStyle>
-          <a:effectLst>
-            <a:outerShdw blurRad="40000" dist="23000" dir="5400000" rotWithShape="0">
-              <a:srgbClr val="000000">
-                <a:alpha val="35000"/>
-              </a:srgbClr>
-            </a:outerShdw>
-          </a:effectLst>
-        </a:effectStyle>
-        <a:effectStyle>
-          <a:effectLst>
-            <a:outerShdw blurRad="40000" dist="23000" dir="5400000" rotWithShape="0">
-              <a:srgbClr val="000000">
-                <a:alpha val="35000"/>
-              </a:srgbClr>
-            </a:outerShdw>
-          </a:effectLst>
-          <a:scene3d>
-            <a:camera prst="orthographicFront">
-              <a:rot lat="0" lon="0" rev="0"/>
-            </a:camera>
-            <a:lightRig rig="threePt" dir="t">
-              <a:rot lat="0" lon="0" rev="1200000"/>
-            </a:lightRig>
-          </a:scene3d>
-          <a:sp3d>
-            <a:bevelT w="63500" h="25400"/>
-          </a:sp3d>
-        </a:effectStyle>
-      </a:effectStyleLst>
-      <a:bgFillStyleLst>
-        <a:solidFill>
-          <a:schemeClr val="phClr"/>
-        </a:solidFill>
-        <a:gradFill rotWithShape="1">
-          <a:gsLst>
-            <a:gs pos="0">
-              <a:schemeClr val="phClr">
-                <a:tint val="40000"/>
-                <a:satMod val="350000"/>
-              </a:schemeClr>
-            </a:gs>
-            <a:gs pos="40000">
-              <a:schemeClr val="phClr">
-                <a:tint val="45000"/>
-                <a:shade val="99000"/>
-                <a:satMod val="350000"/>
-              </a:schemeClr>
-            </a:gs>
-            <a:gs pos="100000">
-              <a:schemeClr val="phClr">
-                <a:shade val="20000"/>
-                <a:satMod val="255000"/>
-              </a:schemeClr>
-            </a:gs>
-          </a:gsLst>
-          <a:path path="circle">
-            <a:fillToRect l="50000" t="-80000" r="50000" b="180000"/>
-          </a:path>
-        </a:gradFill>
-        <a:gradFill rotWithShape="1">
-          <a:gsLst>
-            <a:gs pos="0">
-              <a:schemeClr val="phClr">
-                <a:tint val="80000"/>
-                <a:satMod val="300000"/>
-              </a:schemeClr>
-            </a:gs>
-            <a:gs pos="100000">
-              <a:schemeClr val="phClr">
-                <a:shade val="30000"/>
-                <a:satMod val="200000"/>
-              </a:schemeClr>
-            </a:gs>
-          </a:gsLst>
-          <a:path path="circle">
-            <a:fillToRect l="50000" t="50000" r="50000" b="50000"/>
-          </a:path>
-        </a:gradFill>
-      </a:bgFillStyleLst>
-    </a:fmtScheme>
-  </a:themeElements>
-</a:theme>
 </file>